--- a/Мышка для людей с ограниченной моторикой рук/Документы/Презентация о манипуляторе.pptx
+++ b/Мышка для людей с ограниченной моторикой рук/Документы/Презентация о манипуляторе.pptx
@@ -4168,7 +4168,7 @@
         </p:nvSpPr>
         <p:spPr>
           <a:xfrm>
-            <a:off x="7790829" y="3654214"/>
+            <a:off x="7911479" y="3724064"/>
             <a:ext cx="4401171" cy="2538259"/>
           </a:xfrm>
           <a:prstGeom prst="rect">
@@ -4339,13 +4339,6 @@
   <p:clrMapOvr>
     <a:masterClrMapping/>
   </p:clrMapOvr>
-  <p:timing>
-    <p:tnLst>
-      <p:par>
-        <p:cTn id="1" dur="indefinite" restart="never" nodeType="tmRoot"/>
-      </p:par>
-    </p:tnLst>
-  </p:timing>
 </p:sld>
 </file>
 
@@ -4766,14 +4759,11 @@
               </a:lnSpc>
             </a:pPr>
             <a:r>
-              <a:rPr lang="ru-RU" sz="2000" dirty="0" smtClean="0">
+              <a:rPr lang="ru-RU" sz="2000" dirty="0">
                 <a:latin typeface="Bookman Old Style" panose="02050604050505020204" pitchFamily="18" charset="0"/>
               </a:rPr>
               <a:t>Цифровая среда недоступна для людей с ограниченной моторикой, ведь существующие решения имеют:</a:t>
             </a:r>
-            <a:endParaRPr lang="ru-RU" sz="2000" dirty="0">
-              <a:latin typeface="Bookman Old Style" panose="02050604050505020204" pitchFamily="18" charset="0"/>
-            </a:endParaRPr>
           </a:p>
         </p:txBody>
       </p:sp>
@@ -4807,22 +4797,10 @@
               <a:buChar char="•"/>
             </a:pPr>
             <a:r>
-              <a:rPr lang="ru-RU" sz="2000" dirty="0" smtClean="0">
-                <a:latin typeface="Bookman Old Style" panose="02050604050505020204" pitchFamily="18" charset="0"/>
-              </a:rPr>
-              <a:t>Высоку</a:t>
-            </a:r>
-            <a:r>
               <a:rPr lang="ru-RU" sz="2000" dirty="0">
                 <a:latin typeface="Bookman Old Style" panose="02050604050505020204" pitchFamily="18" charset="0"/>
               </a:rPr>
-              <a:t>ю</a:t>
-            </a:r>
-            <a:r>
-              <a:rPr lang="ru-RU" sz="2000" dirty="0" smtClean="0">
-                <a:latin typeface="Bookman Old Style" panose="02050604050505020204" pitchFamily="18" charset="0"/>
-              </a:rPr>
-              <a:t> стоимость(от 5 тыс. рублей)</a:t>
+              <a:t>Высокую стоимость(от 5 тыс. рублей)</a:t>
             </a:r>
           </a:p>
           <a:p>
@@ -4834,22 +4812,10 @@
               <a:buChar char="•"/>
             </a:pPr>
             <a:r>
-              <a:rPr lang="ru-RU" sz="2000" dirty="0" smtClean="0">
-                <a:latin typeface="Bookman Old Style" panose="02050604050505020204" pitchFamily="18" charset="0"/>
-              </a:rPr>
-              <a:t>Сложну</a:t>
-            </a:r>
-            <a:r>
               <a:rPr lang="ru-RU" sz="2000" dirty="0">
                 <a:latin typeface="Bookman Old Style" panose="02050604050505020204" pitchFamily="18" charset="0"/>
               </a:rPr>
-              <a:t>ю</a:t>
-            </a:r>
-            <a:r>
-              <a:rPr lang="ru-RU" sz="2000" dirty="0" smtClean="0">
-                <a:latin typeface="Bookman Old Style" panose="02050604050505020204" pitchFamily="18" charset="0"/>
-              </a:rPr>
-              <a:t> настройку</a:t>
+              <a:t>Сложную настройку</a:t>
             </a:r>
           </a:p>
           <a:p>
@@ -4861,14 +4827,11 @@
               <a:buChar char="•"/>
             </a:pPr>
             <a:r>
-              <a:rPr lang="ru-RU" sz="2000" dirty="0" smtClean="0">
+              <a:rPr lang="ru-RU" sz="2000" dirty="0">
                 <a:latin typeface="Bookman Old Style" panose="02050604050505020204" pitchFamily="18" charset="0"/>
               </a:rPr>
               <a:t>Минимальную эффективность при треморе</a:t>
             </a:r>
-            <a:endParaRPr lang="ru-RU" sz="2000" dirty="0">
-              <a:latin typeface="Bookman Old Style" panose="02050604050505020204" pitchFamily="18" charset="0"/>
-            </a:endParaRPr>
           </a:p>
         </p:txBody>
       </p:sp>
@@ -4882,13 +4845,6 @@
   <p:clrMapOvr>
     <a:masterClrMapping/>
   </p:clrMapOvr>
-  <p:timing>
-    <p:tnLst>
-      <p:par>
-        <p:cTn id="1" dur="indefinite" restart="never" nodeType="tmRoot"/>
-      </p:par>
-    </p:tnLst>
-  </p:timing>
 </p:sld>
 </file>
 
@@ -5237,62 +5193,6 @@
       </p:pic>
       <p:pic>
         <p:nvPicPr>
-          <p:cNvPr id="1028" name="Picture 4" descr="Logitech Marble Trackball Mouse (910-000808) | 250000072601">
-            <a:extLst>
-              <a:ext uri="{FF2B5EF4-FFF2-40B4-BE49-F238E27FC236}">
-                <a16:creationId xmlns:a16="http://schemas.microsoft.com/office/drawing/2014/main" id="{8813296E-A5AA-7C05-2EB8-E4320A46F88C}"/>
-              </a:ext>
-            </a:extLst>
-          </p:cNvPr>
-          <p:cNvPicPr>
-            <a:picLocks noChangeAspect="1" noChangeArrowheads="1"/>
-          </p:cNvPicPr>
-          <p:nvPr/>
-        </p:nvPicPr>
-        <p:blipFill>
-          <a:blip r:embed="rId3">
-            <a:extLst>
-              <a:ext uri="{BEBA8EAE-BF5A-486C-A8C5-ECC9F3942E4B}">
-                <a14:imgProps xmlns:a14="http://schemas.microsoft.com/office/drawing/2010/main">
-                  <a14:imgLayer r:embed="rId4">
-                    <a14:imgEffect>
-                      <a14:brightnessContrast bright="20000" contrast="-40000"/>
-                    </a14:imgEffect>
-                  </a14:imgLayer>
-                </a14:imgProps>
-              </a:ext>
-              <a:ext uri="{28A0092B-C50C-407E-A947-70E740481C1C}">
-                <a14:useLocalDpi xmlns:a14="http://schemas.microsoft.com/office/drawing/2010/main" val="0"/>
-              </a:ext>
-            </a:extLst>
-          </a:blip>
-          <a:srcRect/>
-          <a:stretch>
-            <a:fillRect/>
-          </a:stretch>
-        </p:blipFill>
-        <p:spPr bwMode="auto">
-          <a:xfrm>
-            <a:off x="8572920" y="1110381"/>
-            <a:ext cx="2573616" cy="2071890"/>
-          </a:xfrm>
-          <a:prstGeom prst="rect">
-            <a:avLst/>
-          </a:prstGeom>
-          <a:noFill/>
-          <a:extLst>
-            <a:ext uri="{909E8E84-426E-40DD-AFC4-6F175D3DCCD1}">
-              <a14:hiddenFill xmlns:a14="http://schemas.microsoft.com/office/drawing/2010/main">
-                <a:solidFill>
-                  <a:srgbClr val="FFFFFF"/>
-                </a:solidFill>
-              </a14:hiddenFill>
-            </a:ext>
-          </a:extLst>
-        </p:spPr>
-      </p:pic>
-      <p:pic>
-        <p:nvPicPr>
           <p:cNvPr id="20" name="Рисунок 19">
             <a:extLst>
               <a:ext uri="{FF2B5EF4-FFF2-40B4-BE49-F238E27FC236}">
@@ -5306,7 +5206,7 @@
           <p:nvPr/>
         </p:nvPicPr>
         <p:blipFill>
-          <a:blip r:embed="rId5">
+          <a:blip r:embed="rId3">
             <a:extLst>
               <a:ext uri="{28A0092B-C50C-407E-A947-70E740481C1C}">
                 <a14:useLocalDpi xmlns:a14="http://schemas.microsoft.com/office/drawing/2010/main" val="0"/>
@@ -5463,25 +5363,16 @@
               <a:t>Dragon Naturally Speaking</a:t>
             </a:r>
             <a:r>
-              <a:rPr lang="ru-RU" sz="2400" dirty="0" smtClean="0">
-                <a:solidFill>
-                  <a:schemeClr val="bg1"/>
-                </a:solidFill>
-                <a:latin typeface="Bookman Old Style" panose="02050604050505020204" pitchFamily="18" charset="0"/>
-              </a:rPr>
-              <a:t>»</a:t>
-            </a:r>
-            <a:r>
               <a:rPr lang="ru-RU" sz="2400" dirty="0">
                 <a:solidFill>
                   <a:schemeClr val="bg1"/>
                 </a:solidFill>
                 <a:latin typeface="Bookman Old Style" panose="02050604050505020204" pitchFamily="18" charset="0"/>
               </a:rPr>
-              <a:t> </a:t>
-            </a:r>
-            <a:r>
-              <a:rPr lang="en-US" sz="2400" dirty="0" smtClean="0">
+              <a:t>» </a:t>
+            </a:r>
+            <a:r>
+              <a:rPr lang="en-US" sz="2400" dirty="0">
                 <a:solidFill>
                   <a:schemeClr val="bg1"/>
                 </a:solidFill>
@@ -5490,7 +5381,7 @@
               <a:t>(</a:t>
             </a:r>
             <a:r>
-              <a:rPr lang="ru-RU" sz="2400" dirty="0" smtClean="0">
+              <a:rPr lang="ru-RU" sz="2400" dirty="0">
                 <a:solidFill>
                   <a:schemeClr val="bg1"/>
                 </a:solidFill>
@@ -5499,7 +5390,7 @@
               <a:t>ПО</a:t>
             </a:r>
             <a:r>
-              <a:rPr lang="en-US" sz="2400" dirty="0" smtClean="0">
+              <a:rPr lang="en-US" sz="2400" dirty="0">
                 <a:solidFill>
                   <a:schemeClr val="bg1"/>
                 </a:solidFill>
@@ -5507,12 +5398,6 @@
               </a:rPr>
               <a:t>)</a:t>
             </a:r>
-            <a:endParaRPr lang="en-US" sz="2400" dirty="0">
-              <a:solidFill>
-                <a:schemeClr val="bg1"/>
-              </a:solidFill>
-              <a:latin typeface="Bookman Old Style" panose="02050604050505020204" pitchFamily="18" charset="0"/>
-            </a:endParaRPr>
           </a:p>
         </p:txBody>
       </p:sp>
@@ -5530,8 +5415,8 @@
         </p:nvSpPr>
         <p:spPr>
           <a:xfrm>
-            <a:off x="8803008" y="4732125"/>
-            <a:ext cx="2948940" cy="830997"/>
+            <a:off x="8660687" y="4575339"/>
+            <a:ext cx="2923442" cy="1200329"/>
           </a:xfrm>
           <a:prstGeom prst="rect">
             <a:avLst/>
@@ -5544,15 +5429,6 @@
           </a:bodyPr>
           <a:lstStyle/>
           <a:p>
-            <a:r>
-              <a:rPr lang="en-US" sz="2400" dirty="0" smtClean="0">
-                <a:solidFill>
-                  <a:schemeClr val="bg1"/>
-                </a:solidFill>
-                <a:latin typeface="Bookman Old Style" panose="02050604050505020204" pitchFamily="18" charset="0"/>
-              </a:rPr>
-              <a:t>Trackball </a:t>
-            </a:r>
             <a:r>
               <a:rPr lang="ru-RU" sz="2400" dirty="0">
                 <a:solidFill>
@@ -5560,7 +5436,7 @@
                 </a:solidFill>
                 <a:latin typeface="Bookman Old Style" panose="02050604050505020204" pitchFamily="18" charset="0"/>
               </a:rPr>
-              <a:t>«</a:t>
+              <a:t>Сенсорные планшеты «</a:t>
             </a:r>
             <a:r>
               <a:rPr lang="en-US" sz="2400" dirty="0">
@@ -5569,26 +5445,50 @@
                 </a:solidFill>
                 <a:latin typeface="Bookman Old Style" panose="02050604050505020204" pitchFamily="18" charset="0"/>
               </a:rPr>
-              <a:t>Logitech Marble</a:t>
-            </a:r>
-            <a:r>
-              <a:rPr lang="ru-RU" sz="2400" dirty="0" smtClean="0">
+              <a:t>Wacom Bamboo</a:t>
+            </a:r>
+            <a:r>
+              <a:rPr lang="ru-RU" sz="2400" dirty="0">
                 <a:solidFill>
                   <a:schemeClr val="bg1"/>
                 </a:solidFill>
                 <a:latin typeface="Bookman Old Style" panose="02050604050505020204" pitchFamily="18" charset="0"/>
               </a:rPr>
-              <a:t>»</a:t>
-            </a:r>
-            <a:endParaRPr lang="ru-RU" sz="2400" dirty="0">
-              <a:solidFill>
-                <a:schemeClr val="bg1"/>
-              </a:solidFill>
-              <a:latin typeface="Bookman Old Style" panose="02050604050505020204" pitchFamily="18" charset="0"/>
-            </a:endParaRPr>
-          </a:p>
-        </p:txBody>
-      </p:sp>
+              <a:t>» </a:t>
+            </a:r>
+          </a:p>
+        </p:txBody>
+      </p:sp>
+      <p:pic>
+        <p:nvPicPr>
+          <p:cNvPr id="7" name="Рисунок 6">
+            <a:extLst>
+              <a:ext uri="{FF2B5EF4-FFF2-40B4-BE49-F238E27FC236}">
+                <a16:creationId xmlns:a16="http://schemas.microsoft.com/office/drawing/2014/main" id="{03C7892F-11C2-B29E-237D-F13D6B767E46}"/>
+              </a:ext>
+            </a:extLst>
+          </p:cNvPr>
+          <p:cNvPicPr>
+            <a:picLocks noChangeAspect="1"/>
+          </p:cNvPicPr>
+          <p:nvPr/>
+        </p:nvPicPr>
+        <p:blipFill>
+          <a:blip r:embed="rId4"/>
+          <a:stretch>
+            <a:fillRect/>
+          </a:stretch>
+        </p:blipFill>
+        <p:spPr>
+          <a:xfrm>
+            <a:off x="8283235" y="470790"/>
+            <a:ext cx="3119716" cy="3119716"/>
+          </a:xfrm>
+          <a:prstGeom prst="rect">
+            <a:avLst/>
+          </a:prstGeom>
+        </p:spPr>
+      </p:pic>
     </p:spTree>
     <p:extLst>
       <p:ext uri="{BB962C8B-B14F-4D97-AF65-F5344CB8AC3E}">
@@ -5599,13 +5499,6 @@
   <p:clrMapOvr>
     <a:masterClrMapping/>
   </p:clrMapOvr>
-  <p:timing>
-    <p:tnLst>
-      <p:par>
-        <p:cTn id="1" dur="indefinite" restart="never" nodeType="tmRoot"/>
-      </p:par>
-    </p:tnLst>
-  </p:timing>
 </p:sld>
 </file>
 
@@ -6009,7 +5902,7 @@
         <p:spPr>
           <a:xfrm>
             <a:off x="193562" y="648172"/>
-            <a:ext cx="9193557" cy="1015663"/>
+            <a:ext cx="9193557" cy="963469"/>
           </a:xfrm>
           <a:prstGeom prst="rect">
             <a:avLst/>
@@ -6029,37 +5922,37 @@
             </a:pPr>
             <a:r>
               <a:rPr lang="ru-RU" sz="2000" b="1" dirty="0">
-                <a:latin typeface="Bahnschrift SemiLight" panose="020B0502040204020203" pitchFamily="34" charset="0"/>
+                <a:latin typeface="Bookman Old Style" panose="02050604050505020204" pitchFamily="18" charset="0"/>
               </a:rPr>
               <a:t>Целью </a:t>
             </a:r>
             <a:r>
               <a:rPr lang="ru-RU" sz="2000" dirty="0">
-                <a:latin typeface="Bahnschrift SemiLight" panose="020B0502040204020203" pitchFamily="34" charset="0"/>
+                <a:latin typeface="Bookman Old Style" panose="02050604050505020204" pitchFamily="18" charset="0"/>
               </a:rPr>
               <a:t>работы</a:t>
             </a:r>
             <a:r>
               <a:rPr lang="ru-RU" sz="2000" b="1" dirty="0">
-                <a:latin typeface="Bahnschrift SemiLight" panose="020B0502040204020203" pitchFamily="34" charset="0"/>
+                <a:latin typeface="Bookman Old Style" panose="02050604050505020204" pitchFamily="18" charset="0"/>
               </a:rPr>
               <a:t> </a:t>
             </a:r>
             <a:r>
               <a:rPr lang="ru-RU" sz="2000" dirty="0">
-                <a:latin typeface="Bahnschrift SemiLight" panose="020B0502040204020203" pitchFamily="34" charset="0"/>
+                <a:latin typeface="Bookman Old Style" panose="02050604050505020204" pitchFamily="18" charset="0"/>
               </a:rPr>
               <a:t>является</a:t>
             </a:r>
             <a:r>
               <a:rPr lang="ru-RU" sz="2000" b="1" dirty="0">
-                <a:latin typeface="Bahnschrift SemiLight" panose="020B0502040204020203" pitchFamily="34" charset="0"/>
+                <a:latin typeface="Bookman Old Style" panose="02050604050505020204" pitchFamily="18" charset="0"/>
               </a:rPr>
               <a:t> </a:t>
             </a:r>
             <a:r>
               <a:rPr lang="ru-RU" sz="2000" dirty="0">
-                <a:latin typeface="Bahnschrift SemiLight" panose="020B0502040204020203" pitchFamily="34" charset="0"/>
+                <a:latin typeface="Bookman Old Style" panose="02050604050505020204" pitchFamily="18" charset="0"/>
               </a:rPr>
               <a:t>создание механического манипулятора, обеспечивающего:</a:t>
             </a:r>
@@ -6080,7 +5973,7 @@
         </p:nvSpPr>
         <p:spPr>
           <a:xfrm>
-            <a:off x="777723" y="1560994"/>
+            <a:off x="777723" y="1503373"/>
             <a:ext cx="6719872" cy="2400657"/>
           </a:xfrm>
           <a:prstGeom prst="rect">
@@ -6103,7 +5996,7 @@
             </a:pPr>
             <a:r>
               <a:rPr lang="ru-RU" sz="2000" dirty="0">
-                <a:latin typeface="Bahnschrift SemiLight" panose="020B0502040204020203" pitchFamily="34" charset="0"/>
+                <a:latin typeface="Bookman Old Style" panose="02050604050505020204" pitchFamily="18" charset="0"/>
               </a:rPr>
               <a:t>Стабильное и точное управление курсором</a:t>
             </a:r>
@@ -6118,7 +6011,7 @@
             </a:pPr>
             <a:r>
               <a:rPr lang="ru-RU" sz="2000" dirty="0">
-                <a:latin typeface="Bahnschrift SemiLight" panose="020B0502040204020203" pitchFamily="34" charset="0"/>
+                <a:latin typeface="Bookman Old Style" panose="02050604050505020204" pitchFamily="18" charset="0"/>
               </a:rPr>
               <a:t>Пассивную физическую стабилизацию руки</a:t>
             </a:r>
@@ -6133,7 +6026,7 @@
             </a:pPr>
             <a:r>
               <a:rPr lang="ru-RU" sz="2000" dirty="0">
-                <a:latin typeface="Bahnschrift SemiLight" panose="020B0502040204020203" pitchFamily="34" charset="0"/>
+                <a:latin typeface="Bookman Old Style" panose="02050604050505020204" pitchFamily="18" charset="0"/>
               </a:rPr>
               <a:t>Отсутствие сложной калибровки</a:t>
             </a:r>
@@ -6148,9 +6041,9 @@
             </a:pPr>
             <a:r>
               <a:rPr lang="ru-RU" sz="2000" dirty="0">
-                <a:latin typeface="Bahnschrift SemiLight" panose="020B0502040204020203" pitchFamily="34" charset="0"/>
+                <a:latin typeface="Bookman Old Style" panose="02050604050505020204" pitchFamily="18" charset="0"/>
               </a:rPr>
-              <a:t>Работа в любой среде, с плохим освещением или в шумных местах по типу офиса</a:t>
+              <a:t>Работа в любой среде, с плохим освещением или в шумных местах</a:t>
             </a:r>
           </a:p>
         </p:txBody>
@@ -6169,7 +6062,7 @@
         </p:nvSpPr>
         <p:spPr>
           <a:xfrm>
-            <a:off x="3838838" y="3990448"/>
+            <a:off x="4244522" y="3946446"/>
             <a:ext cx="5655094" cy="400110"/>
           </a:xfrm>
           <a:prstGeom prst="rect">
@@ -6185,13 +6078,13 @@
           <a:p>
             <a:r>
               <a:rPr lang="ru-RU" sz="2000" dirty="0">
-                <a:latin typeface="Bahnschrift SemiLight" panose="020B0502040204020203" pitchFamily="34" charset="0"/>
+                <a:latin typeface="Bookman Old Style" panose="02050604050505020204" pitchFamily="18" charset="0"/>
               </a:rPr>
               <a:t>Задачи проекта</a:t>
             </a:r>
             <a:r>
               <a:rPr lang="ru-RU" sz="2000" b="1" dirty="0">
-                <a:latin typeface="Bahnschrift SemiLight" panose="020B0502040204020203" pitchFamily="34" charset="0"/>
+                <a:latin typeface="Bookman Old Style" panose="02050604050505020204" pitchFamily="18" charset="0"/>
               </a:rPr>
               <a:t>:</a:t>
             </a:r>
@@ -6212,7 +6105,7 @@
         </p:nvSpPr>
         <p:spPr>
           <a:xfrm>
-            <a:off x="4439263" y="3853173"/>
+            <a:off x="4844947" y="3809171"/>
             <a:ext cx="7752737" cy="2400657"/>
           </a:xfrm>
           <a:prstGeom prst="rect">
@@ -6232,7 +6125,7 @@
               </a:lnSpc>
             </a:pPr>
             <a:endParaRPr lang="ru-RU" sz="2000" dirty="0">
-              <a:latin typeface="Bahnschrift SemiLight" panose="020B0502040204020203" pitchFamily="34" charset="0"/>
+              <a:latin typeface="Bookman Old Style" panose="02050604050505020204" pitchFamily="18" charset="0"/>
             </a:endParaRPr>
           </a:p>
           <a:p>
@@ -6245,7 +6138,7 @@
             </a:pPr>
             <a:r>
               <a:rPr lang="ru-RU" sz="2000" dirty="0">
-                <a:latin typeface="Bahnschrift SemiLight" panose="020B0502040204020203" pitchFamily="34" charset="0"/>
+                <a:latin typeface="Bookman Old Style" panose="02050604050505020204" pitchFamily="18" charset="0"/>
               </a:rPr>
               <a:t>Подобрать материалы и электрические компоненты</a:t>
             </a:r>
@@ -6260,7 +6153,7 @@
             </a:pPr>
             <a:r>
               <a:rPr lang="ru-RU" sz="2000" dirty="0">
-                <a:latin typeface="Bahnschrift SemiLight" panose="020B0502040204020203" pitchFamily="34" charset="0"/>
+                <a:latin typeface="Bookman Old Style" panose="02050604050505020204" pitchFamily="18" charset="0"/>
               </a:rPr>
               <a:t>Разработать 3D-модель корпуса с учетом эргономики</a:t>
             </a:r>
@@ -6275,7 +6168,7 @@
             </a:pPr>
             <a:r>
               <a:rPr lang="ru-RU" sz="2000" dirty="0">
-                <a:latin typeface="Bahnschrift SemiLight" panose="020B0502040204020203" pitchFamily="34" charset="0"/>
+                <a:latin typeface="Bookman Old Style" panose="02050604050505020204" pitchFamily="18" charset="0"/>
               </a:rPr>
               <a:t>Распечатать и запрограммировать устройство</a:t>
             </a:r>
@@ -6290,7 +6183,7 @@
             </a:pPr>
             <a:r>
               <a:rPr lang="ru-RU" sz="2000" dirty="0">
-                <a:latin typeface="Bahnschrift SemiLight" panose="020B0502040204020203" pitchFamily="34" charset="0"/>
+                <a:latin typeface="Bookman Old Style" panose="02050604050505020204" pitchFamily="18" charset="0"/>
               </a:rPr>
               <a:t>Протестировать функциональность</a:t>
             </a:r>
@@ -6307,13 +6200,6 @@
   <p:clrMapOvr>
     <a:masterClrMapping/>
   </p:clrMapOvr>
-  <p:timing>
-    <p:tnLst>
-      <p:par>
-        <p:cTn id="1" dur="indefinite" restart="never" nodeType="tmRoot"/>
-      </p:par>
-    </p:tnLst>
-  </p:timing>
 </p:sld>
 </file>
 
@@ -6638,14 +6524,14 @@
           <p:nvPr>
             <p:extLst>
               <p:ext uri="{D42A27DB-BD31-4B8C-83A1-F6EECF244321}">
-                <p14:modId xmlns:p14="http://schemas.microsoft.com/office/powerpoint/2010/main" val="442174884"/>
+                <p14:modId xmlns:p14="http://schemas.microsoft.com/office/powerpoint/2010/main" val="701308025"/>
               </p:ext>
             </p:extLst>
           </p:nvPr>
         </p:nvGraphicFramePr>
         <p:xfrm>
           <a:off x="354515" y="980471"/>
-          <a:ext cx="3062373" cy="5017159"/>
+          <a:ext cx="3062373" cy="4890168"/>
         </p:xfrm>
         <a:graphic>
           <a:graphicData uri="http://schemas.openxmlformats.org/drawingml/2006/table">
@@ -6783,24 +6669,17 @@
                           <a:effectLst/>
                           <a:latin typeface="Bookman Old Style" panose="02050604050505020204" pitchFamily="18" charset="0"/>
                         </a:rPr>
-                        <a:t> (330 г</a:t>
+                        <a:t> (330 г.),</a:t>
                       </a:r>
                       <a:r>
-                        <a:rPr lang="ru-RU" sz="1200" b="0" kern="100" dirty="0" smtClean="0">
-                          <a:effectLst/>
-                          <a:latin typeface="Bookman Old Style" panose="02050604050505020204" pitchFamily="18" charset="0"/>
-                        </a:rPr>
-                        <a:t>.),</a:t>
-                      </a:r>
-                      <a:r>
-                        <a:rPr lang="ru-RU" sz="1200" b="0" kern="100" baseline="0" dirty="0" smtClean="0">
+                        <a:rPr lang="ru-RU" sz="1200" b="0" kern="100" baseline="0" dirty="0">
                           <a:effectLst/>
                           <a:latin typeface="Bookman Old Style" panose="02050604050505020204" pitchFamily="18" charset="0"/>
                         </a:rPr>
                         <a:t> </a:t>
                       </a:r>
                       <a:r>
-                        <a:rPr lang="ru-RU" sz="1200" b="0" kern="100" dirty="0" smtClean="0">
+                        <a:rPr lang="ru-RU" sz="1200" b="0" kern="100" dirty="0">
                           <a:effectLst/>
                           <a:latin typeface="Bookman Old Style" panose="02050604050505020204" pitchFamily="18" charset="0"/>
                         </a:rPr>
@@ -6830,7 +6709,7 @@
                         </a:spcAft>
                       </a:pPr>
                       <a:r>
-                        <a:rPr lang="ru-RU" sz="1200" b="0" kern="100" dirty="0" smtClean="0">
+                        <a:rPr lang="ru-RU" sz="1200" b="0" kern="100" dirty="0">
                           <a:effectLst/>
                           <a:latin typeface="Bookman Old Style" panose="02050604050505020204" pitchFamily="18" charset="0"/>
                           <a:ea typeface="+mn-ea"/>
@@ -6854,7 +6733,7 @@
                   </a:ext>
                 </a:extLst>
               </a:tr>
-              <a:tr h="2217498">
+              <a:tr h="2090507">
                 <a:tc>
                   <a:txBody>
                     <a:bodyPr/>
@@ -6873,35 +6752,21 @@
                           <a:effectLst/>
                           <a:latin typeface="Bookman Old Style" panose="02050604050505020204" pitchFamily="18" charset="0"/>
                         </a:rPr>
-                        <a:t>Электрические </a:t>
+                        <a:t>Электрические компоненты(гироскоп,</a:t>
                       </a:r>
                       <a:r>
-                        <a:rPr lang="ru-RU" sz="1200" b="0" kern="100" dirty="0" smtClean="0">
-                          <a:effectLst/>
-                          <a:latin typeface="Bookman Old Style" panose="02050604050505020204" pitchFamily="18" charset="0"/>
-                        </a:rPr>
-                        <a:t>компоненты(гироскоп,</a:t>
-                      </a:r>
-                      <a:r>
-                        <a:rPr lang="ru-RU" sz="1200" b="0" kern="100" baseline="0" dirty="0" smtClean="0">
+                        <a:rPr lang="ru-RU" sz="1200" b="0" kern="100" baseline="0" dirty="0">
                           <a:effectLst/>
                           <a:latin typeface="Bookman Old Style" panose="02050604050505020204" pitchFamily="18" charset="0"/>
                         </a:rPr>
                         <a:t> </a:t>
                       </a:r>
                       <a:r>
-                        <a:rPr lang="ru-RU" sz="1200" b="0" kern="100" dirty="0" smtClean="0">
-                          <a:effectLst/>
-                          <a:latin typeface="Bookman Old Style" panose="02050604050505020204" pitchFamily="18" charset="0"/>
-                        </a:rPr>
-                        <a:t>кнопки</a:t>
-                      </a:r>
-                      <a:r>
                         <a:rPr lang="ru-RU" sz="1200" b="0" kern="100" dirty="0">
                           <a:effectLst/>
                           <a:latin typeface="Bookman Old Style" panose="02050604050505020204" pitchFamily="18" charset="0"/>
                         </a:rPr>
-                        <a:t>, энкодер инкрементальный, </a:t>
+                        <a:t>кнопки, энкодер инкрементальный, </a:t>
                       </a:r>
                       <a:r>
                         <a:rPr lang="en-US" sz="1200" b="0" kern="100" dirty="0">
@@ -7008,7 +6873,7 @@
                         </a:spcAft>
                       </a:pPr>
                       <a:r>
-                        <a:rPr lang="ru-RU" sz="1200" b="0" kern="100" dirty="0" smtClean="0">
+                        <a:rPr lang="ru-RU" sz="1200" b="0" kern="100" dirty="0">
                           <a:effectLst/>
                           <a:latin typeface="Bookman Old Style" panose="02050604050505020204" pitchFamily="18" charset="0"/>
                         </a:rPr>
@@ -7043,7 +6908,7 @@
           <p:nvPr>
             <p:extLst>
               <p:ext uri="{D42A27DB-BD31-4B8C-83A1-F6EECF244321}">
-                <p14:modId xmlns:p14="http://schemas.microsoft.com/office/powerpoint/2010/main" val="1539278281"/>
+                <p14:modId xmlns:p14="http://schemas.microsoft.com/office/powerpoint/2010/main" val="175630079"/>
               </p:ext>
             </p:extLst>
           </p:nvPr>
@@ -7200,32 +7065,18 @@
                         <a:t>Пластик </a:t>
                       </a:r>
                       <a:r>
-                        <a:rPr lang="en-US" sz="1200" b="0" kern="100" dirty="0" smtClean="0">
+                        <a:rPr lang="en-US" sz="1200" b="0" kern="100" dirty="0">
                           <a:effectLst/>
                           <a:latin typeface="Bookman Old Style" panose="02050604050505020204" pitchFamily="18" charset="0"/>
                         </a:rPr>
                         <a:t>ABS</a:t>
                       </a:r>
                       <a:r>
-                        <a:rPr lang="ru-RU" sz="1200" b="0" kern="100" dirty="0" smtClean="0">
-                          <a:effectLst/>
-                          <a:latin typeface="Bookman Old Style" panose="02050604050505020204" pitchFamily="18" charset="0"/>
-                        </a:rPr>
-                        <a:t> </a:t>
-                      </a:r>
-                      <a:r>
                         <a:rPr lang="ru-RU" sz="1200" b="0" kern="100" dirty="0">
                           <a:effectLst/>
                           <a:latin typeface="Bookman Old Style" panose="02050604050505020204" pitchFamily="18" charset="0"/>
                         </a:rPr>
-                        <a:t>(330 г.), </a:t>
-                      </a:r>
-                      <a:r>
-                        <a:rPr lang="ru-RU" sz="1200" b="0" kern="100" dirty="0" smtClean="0">
-                          <a:effectLst/>
-                          <a:latin typeface="Bookman Old Style" panose="02050604050505020204" pitchFamily="18" charset="0"/>
-                        </a:rPr>
-                        <a:t>пружины</a:t>
+                        <a:t> (330 г.), пружины</a:t>
                       </a:r>
                       <a:endParaRPr lang="ru-RU" sz="1200" b="0" kern="100" dirty="0">
                         <a:effectLst/>
@@ -7251,7 +7102,7 @@
                         </a:spcAft>
                       </a:pPr>
                       <a:r>
-                        <a:rPr lang="ru-RU" sz="1200" b="0" kern="100" dirty="0" smtClean="0">
+                        <a:rPr lang="ru-RU" sz="1200" b="0" kern="100" dirty="0">
                           <a:effectLst/>
                           <a:latin typeface="Bookman Old Style" panose="02050604050505020204" pitchFamily="18" charset="0"/>
                         </a:rPr>
@@ -7281,53 +7132,32 @@
                         </a:spcAft>
                       </a:pPr>
                       <a:r>
-                        <a:rPr lang="ru-RU" sz="1200" b="0" kern="100" dirty="0" smtClean="0">
+                        <a:rPr lang="ru-RU" sz="1200" b="0" kern="100" dirty="0">
                           <a:effectLst/>
                           <a:latin typeface="Bookman Old Style" panose="02050604050505020204" pitchFamily="18" charset="0"/>
                         </a:rPr>
                         <a:t>Для</a:t>
                       </a:r>
                       <a:r>
-                        <a:rPr lang="ru-RU" sz="1200" b="0" kern="100" baseline="0" dirty="0" smtClean="0">
+                        <a:rPr lang="ru-RU" sz="1200" b="0" kern="100" baseline="0" dirty="0">
                           <a:effectLst/>
                           <a:latin typeface="Bookman Old Style" panose="02050604050505020204" pitchFamily="18" charset="0"/>
                         </a:rPr>
                         <a:t> литья используем </a:t>
                       </a:r>
                       <a:r>
-                        <a:rPr lang="en-US" sz="1200" b="0" kern="100" baseline="0" dirty="0" smtClean="0">
+                        <a:rPr lang="en-US" sz="1200" b="0" kern="100" baseline="0" dirty="0">
                           <a:effectLst/>
                           <a:latin typeface="Bookman Old Style" panose="02050604050505020204" pitchFamily="18" charset="0"/>
                         </a:rPr>
                         <a:t>ABS. </a:t>
                       </a:r>
                       <a:r>
-                        <a:rPr lang="ru-RU" sz="1200" b="0" kern="100" dirty="0" smtClean="0">
-                          <a:effectLst/>
-                          <a:latin typeface="Bookman Old Style" panose="02050604050505020204" pitchFamily="18" charset="0"/>
-                        </a:rPr>
-                        <a:t>Оптовая </a:t>
-                      </a:r>
-                      <a:r>
                         <a:rPr lang="ru-RU" sz="1200" b="0" kern="100" dirty="0">
                           <a:effectLst/>
                           <a:latin typeface="Bookman Old Style" panose="02050604050505020204" pitchFamily="18" charset="0"/>
                         </a:rPr>
-                        <a:t>закупка </a:t>
-                      </a:r>
-                      <a:r>
-                        <a:rPr lang="ru-RU" sz="1200" b="0" kern="100" dirty="0" smtClean="0">
-                          <a:effectLst/>
-                          <a:latin typeface="Bookman Old Style" panose="02050604050505020204" pitchFamily="18" charset="0"/>
-                        </a:rPr>
-                        <a:t>(400 </a:t>
-                      </a:r>
-                      <a:r>
-                        <a:rPr lang="ru-RU" sz="1200" b="0" kern="100" dirty="0">
-                          <a:effectLst/>
-                          <a:latin typeface="Bookman Old Style" panose="02050604050505020204" pitchFamily="18" charset="0"/>
-                        </a:rPr>
-                        <a:t>р., Снижение цены 15% при покупке оптом &gt;10 кг пластика или &gt;500 шт. пружин)</a:t>
+                        <a:t>Оптовая закупка (400 р., Снижение цены 15% при покупке оптом &gt;10 кг пластика или &gt;500 шт. пружин)</a:t>
                       </a:r>
                       <a:endParaRPr lang="ru-RU" sz="1200" b="0" kern="100" dirty="0">
                         <a:effectLst/>
@@ -7360,35 +7190,35 @@
                         </a:spcAft>
                       </a:pPr>
                       <a:r>
-                        <a:rPr lang="ru-RU" sz="1200" b="0" kern="100" dirty="0" smtClean="0">
+                        <a:rPr lang="ru-RU" sz="1200" b="0" kern="100" dirty="0">
                           <a:effectLst/>
                           <a:latin typeface="Bookman Old Style" panose="02050604050505020204" pitchFamily="18" charset="0"/>
                         </a:rPr>
                         <a:t>Электрические компоненты(гироскоп,</a:t>
                       </a:r>
                       <a:r>
-                        <a:rPr lang="ru-RU" sz="1200" b="0" kern="100" baseline="0" dirty="0" smtClean="0">
+                        <a:rPr lang="ru-RU" sz="1200" b="0" kern="100" baseline="0" dirty="0">
                           <a:effectLst/>
                           <a:latin typeface="Bookman Old Style" panose="02050604050505020204" pitchFamily="18" charset="0"/>
                         </a:rPr>
                         <a:t> </a:t>
                       </a:r>
                       <a:r>
-                        <a:rPr lang="ru-RU" sz="1200" b="0" kern="100" dirty="0" smtClean="0">
+                        <a:rPr lang="ru-RU" sz="1200" b="0" kern="100" dirty="0">
                           <a:effectLst/>
                           <a:latin typeface="Bookman Old Style" panose="02050604050505020204" pitchFamily="18" charset="0"/>
                         </a:rPr>
                         <a:t>кнопки, энкодер инкрементальный, </a:t>
                       </a:r>
                       <a:r>
-                        <a:rPr lang="en-US" sz="1200" b="0" kern="100" dirty="0" smtClean="0">
+                        <a:rPr lang="en-US" sz="1200" b="0" kern="100" dirty="0">
                           <a:effectLst/>
                           <a:latin typeface="Bookman Old Style" panose="02050604050505020204" pitchFamily="18" charset="0"/>
                         </a:rPr>
                         <a:t>Arduino Pro Micro</a:t>
                       </a:r>
                       <a:r>
-                        <a:rPr lang="ru-RU" sz="1200" b="0" kern="100" dirty="0" smtClean="0">
+                        <a:rPr lang="ru-RU" sz="1200" b="0" kern="100" dirty="0">
                           <a:effectLst/>
                           <a:latin typeface="Bookman Old Style" panose="02050604050505020204" pitchFamily="18" charset="0"/>
                         </a:rPr>
@@ -7485,32 +7315,25 @@
                         </a:spcAft>
                       </a:pPr>
                       <a:r>
-                        <a:rPr lang="ru-RU" sz="1200" b="0" kern="100" dirty="0" smtClean="0">
+                        <a:rPr lang="ru-RU" sz="1200" b="0" kern="100" dirty="0">
                           <a:effectLst/>
                           <a:latin typeface="Bookman Old Style" panose="02050604050505020204" pitchFamily="18" charset="0"/>
                         </a:rPr>
                         <a:t>Литьё из пластмассы</a:t>
                       </a:r>
                       <a:r>
-                        <a:rPr lang="ru-RU" sz="1200" b="0" kern="100" baseline="0" dirty="0" smtClean="0">
+                        <a:rPr lang="ru-RU" sz="1200" b="0" kern="100" baseline="0" dirty="0">
                           <a:effectLst/>
                           <a:latin typeface="Bookman Old Style" panose="02050604050505020204" pitchFamily="18" charset="0"/>
                         </a:rPr>
                         <a:t> </a:t>
                       </a:r>
                       <a:r>
-                        <a:rPr lang="ru-RU" sz="1200" b="0" kern="100" dirty="0" smtClean="0">
-                          <a:effectLst/>
-                          <a:latin typeface="Bookman Old Style" panose="02050604050505020204" pitchFamily="18" charset="0"/>
-                        </a:rPr>
-                        <a:t>и </a:t>
-                      </a:r>
-                      <a:r>
                         <a:rPr lang="ru-RU" sz="1200" b="0" kern="100" dirty="0">
                           <a:effectLst/>
                           <a:latin typeface="Bookman Old Style" panose="02050604050505020204" pitchFamily="18" charset="0"/>
                         </a:rPr>
-                        <a:t>сборка</a:t>
+                        <a:t>и сборка</a:t>
                       </a:r>
                       <a:endParaRPr lang="ru-RU" sz="1200" b="0" kern="100" dirty="0">
                         <a:effectLst/>
@@ -7558,32 +7381,32 @@
                     <a:lstStyle/>
                     <a:p>
                       <a:r>
-                        <a:rPr lang="ru-RU" sz="1200" b="0" kern="100" dirty="0" smtClean="0">
+                        <a:rPr lang="ru-RU" sz="1200" b="0" kern="100" dirty="0">
                           <a:effectLst/>
                           <a:latin typeface="Bookman Old Style" panose="02050604050505020204" pitchFamily="18" charset="0"/>
                         </a:rPr>
                         <a:t>Использование литья</a:t>
                       </a:r>
                       <a:r>
-                        <a:rPr lang="ru-RU" sz="1200" b="0" kern="100" baseline="0" dirty="0" smtClean="0">
+                        <a:rPr lang="ru-RU" sz="1200" b="0" kern="100" baseline="0" dirty="0">
                           <a:effectLst/>
                           <a:latin typeface="Bookman Old Style" panose="02050604050505020204" pitchFamily="18" charset="0"/>
                         </a:rPr>
-                        <a:t> пластмасс вместо 3</a:t>
+                        <a:t> пластмассы вместо 3</a:t>
                       </a:r>
                       <a:r>
-                        <a:rPr lang="en-US" sz="1200" b="0" kern="100" baseline="0" dirty="0" smtClean="0">
+                        <a:rPr lang="en-US" sz="1200" b="0" kern="100" baseline="0" dirty="0">
                           <a:effectLst/>
                           <a:latin typeface="Bookman Old Style" panose="02050604050505020204" pitchFamily="18" charset="0"/>
                         </a:rPr>
                         <a:t>D</a:t>
                       </a:r>
                       <a:r>
-                        <a:rPr lang="ru-RU" sz="1200" b="0" kern="100" baseline="0" dirty="0" smtClean="0">
+                        <a:rPr lang="ru-RU" sz="1200" b="0" kern="100" baseline="0" dirty="0">
                           <a:effectLst/>
                           <a:latin typeface="Bookman Old Style" panose="02050604050505020204" pitchFamily="18" charset="0"/>
                         </a:rPr>
-                        <a:t>-печати</a:t>
+                        <a:t>-печати, что более эффективно при серийном производстве</a:t>
                       </a:r>
                       <a:endParaRPr lang="ru-RU" sz="1800" b="1" i="0" kern="1200" dirty="0">
                         <a:solidFill>
@@ -7727,17 +7550,10 @@
                           <a:effectLst/>
                           <a:latin typeface="Bookman Old Style" panose="02050604050505020204" pitchFamily="18" charset="0"/>
                         </a:rPr>
-                        <a:t> </a:t>
+                        <a:t> себе</a:t>
                       </a:r>
                       <a:r>
-                        <a:rPr lang="ru-RU" sz="1200" b="0" kern="100" baseline="0" dirty="0" smtClean="0">
-                          <a:effectLst/>
-                          <a:latin typeface="Bookman Old Style" panose="02050604050505020204" pitchFamily="18" charset="0"/>
-                        </a:rPr>
-                        <a:t>себе</a:t>
-                      </a:r>
-                      <a:r>
-                        <a:rPr lang="ru-RU" sz="1200" b="0" kern="100" dirty="0" smtClean="0">
+                        <a:rPr lang="ru-RU" sz="1200" b="0" kern="100" dirty="0">
                           <a:effectLst/>
                           <a:latin typeface="Bookman Old Style" panose="02050604050505020204" pitchFamily="18" charset="0"/>
                         </a:rPr>
@@ -7771,7 +7587,7 @@
                           <a:effectLst/>
                           <a:latin typeface="Bookman Old Style" panose="02050604050505020204" pitchFamily="18" charset="0"/>
                         </a:rPr>
-                        <a:t>1620</a:t>
+                        <a:t>1450</a:t>
                       </a:r>
                       <a:endParaRPr lang="ru-RU" sz="1200" b="0" kern="100" dirty="0">
                         <a:effectLst/>
@@ -7833,13 +7649,6 @@
   <p:clrMapOvr>
     <a:masterClrMapping/>
   </p:clrMapOvr>
-  <p:timing>
-    <p:tnLst>
-      <p:par>
-        <p:cTn id="1" dur="indefinite" restart="never" nodeType="tmRoot"/>
-      </p:par>
-    </p:tnLst>
-  </p:timing>
 </p:sld>
 </file>
 
@@ -8221,7 +8030,7 @@
         </p:nvSpPr>
         <p:spPr>
           <a:xfrm>
-            <a:off x="1169927" y="1610610"/>
+            <a:off x="365211" y="1747770"/>
             <a:ext cx="7379574" cy="1887696"/>
           </a:xfrm>
           <a:prstGeom prst="rect">
@@ -8243,7 +8052,7 @@
               <a:buChar char="•"/>
             </a:pPr>
             <a:r>
-              <a:rPr lang="ru-RU" sz="2400" dirty="0" smtClean="0">
+              <a:rPr lang="ru-RU" sz="2400" dirty="0">
                 <a:latin typeface="Bookman Old Style" panose="02050604050505020204" pitchFamily="18" charset="0"/>
               </a:rPr>
               <a:t>PLA</a:t>
@@ -8257,7 +8066,7 @@
               <a:buFont typeface="Arial" panose="020B0604020202020204" pitchFamily="34" charset="0"/>
               <a:buChar char="•"/>
             </a:pPr>
-            <a:endParaRPr lang="ru-RU" sz="2400" dirty="0" smtClean="0">
+            <a:endParaRPr lang="ru-RU" sz="2400" dirty="0">
               <a:latin typeface="Bookman Old Style" panose="02050604050505020204" pitchFamily="18" charset="0"/>
             </a:endParaRPr>
           </a:p>
@@ -8270,7 +8079,7 @@
               <a:buChar char="•"/>
             </a:pPr>
             <a:r>
-              <a:rPr lang="ru-RU" sz="2400" dirty="0" smtClean="0">
+              <a:rPr lang="ru-RU" sz="2400" dirty="0">
                 <a:latin typeface="Bookman Old Style" panose="02050604050505020204" pitchFamily="18" charset="0"/>
               </a:rPr>
               <a:t>ABS</a:t>
@@ -8284,7 +8093,7 @@
               <a:buFont typeface="Arial" panose="020B0604020202020204" pitchFamily="34" charset="0"/>
               <a:buChar char="•"/>
             </a:pPr>
-            <a:endParaRPr lang="ru-RU" sz="2400" dirty="0" smtClean="0">
+            <a:endParaRPr lang="ru-RU" sz="2400" dirty="0">
               <a:latin typeface="Bookman Old Style" panose="02050604050505020204" pitchFamily="18" charset="0"/>
             </a:endParaRPr>
           </a:p>
@@ -8297,14 +8106,11 @@
               <a:buChar char="•"/>
             </a:pPr>
             <a:r>
-              <a:rPr lang="ru-RU" sz="2400" dirty="0" smtClean="0">
+              <a:rPr lang="ru-RU" sz="2400" dirty="0">
                 <a:latin typeface="Bookman Old Style" panose="02050604050505020204" pitchFamily="18" charset="0"/>
               </a:rPr>
               <a:t>PETG</a:t>
             </a:r>
-            <a:endParaRPr lang="ru-RU" sz="2400" dirty="0">
-              <a:latin typeface="Bookman Old Style" panose="02050604050505020204" pitchFamily="18" charset="0"/>
-            </a:endParaRPr>
           </a:p>
         </p:txBody>
       </p:sp>
@@ -8322,7 +8128,7 @@
         </p:nvSpPr>
         <p:spPr>
           <a:xfrm>
-            <a:off x="581856" y="4336055"/>
+            <a:off x="109726" y="4264240"/>
             <a:ext cx="6816472" cy="1015663"/>
           </a:xfrm>
           <a:prstGeom prst="rect">
@@ -8502,13 +8308,6 @@
   <p:clrMapOvr>
     <a:masterClrMapping/>
   </p:clrMapOvr>
-  <p:timing>
-    <p:tnLst>
-      <p:par>
-        <p:cTn id="1" dur="indefinite" restart="never" nodeType="tmRoot"/>
-      </p:par>
-    </p:tnLst>
-  </p:timing>
 </p:sld>
 </file>
 
@@ -9045,8 +8844,8 @@
         </p:blipFill>
         <p:spPr>
           <a:xfrm>
-            <a:off x="1263198" y="4650889"/>
-            <a:ext cx="2587691" cy="2039512"/>
+            <a:off x="1263199" y="4650889"/>
+            <a:ext cx="2494854" cy="2039512"/>
           </a:xfrm>
           <a:prstGeom prst="rect">
             <a:avLst/>
@@ -9340,7 +9139,7 @@
         <p:spPr>
           <a:xfrm>
             <a:off x="5023720" y="3650552"/>
-            <a:ext cx="4789729" cy="1661993"/>
+            <a:ext cx="4789729" cy="2009974"/>
           </a:xfrm>
           <a:prstGeom prst="rect">
             <a:avLst/>
@@ -9362,19 +9161,7 @@
               <a:rPr lang="ru-RU" sz="1700" dirty="0">
                 <a:latin typeface="Bookman Old Style" panose="02050604050505020204" pitchFamily="18" charset="0"/>
               </a:rPr>
-              <a:t>После определения эл. компонентов началось моделирование деталей манипулятора. </a:t>
-            </a:r>
-            <a:r>
-              <a:rPr lang="ru-RU" sz="1700" dirty="0" smtClean="0">
-                <a:latin typeface="Bookman Old Style" panose="02050604050505020204" pitchFamily="18" charset="0"/>
-              </a:rPr>
-              <a:t>Потом </a:t>
-            </a:r>
-            <a:r>
-              <a:rPr lang="ru-RU" sz="1700" dirty="0">
-                <a:latin typeface="Bookman Old Style" panose="02050604050505020204" pitchFamily="18" charset="0"/>
-              </a:rPr>
-              <a:t>последовала 3</a:t>
+              <a:t>После определения электрических компонентов началось моделирование деталей манипулятора. Потом последовала 3</a:t>
             </a:r>
             <a:r>
               <a:rPr lang="en-US" sz="1700" dirty="0">
@@ -9386,17 +9173,8 @@
               <a:rPr lang="ru-RU" sz="1700" dirty="0">
                 <a:latin typeface="Bookman Old Style" panose="02050604050505020204" pitchFamily="18" charset="0"/>
               </a:rPr>
-              <a:t> печать и зачистка </a:t>
-            </a:r>
-            <a:r>
-              <a:rPr lang="ru-RU" sz="1700" dirty="0" smtClean="0">
-                <a:latin typeface="Bookman Old Style" panose="02050604050505020204" pitchFamily="18" charset="0"/>
-              </a:rPr>
-              <a:t>деталей.</a:t>
-            </a:r>
-            <a:endParaRPr lang="ru-RU" sz="1700" dirty="0">
-              <a:latin typeface="Bookman Old Style" panose="02050604050505020204" pitchFamily="18" charset="0"/>
-            </a:endParaRPr>
+              <a:t> печать и зачистка деталей.</a:t>
+            </a:r>
           </a:p>
         </p:txBody>
       </p:sp>
@@ -9427,10 +9205,16 @@
               <a:buAutoNum type="arabicPeriod"/>
             </a:pPr>
             <a:r>
+              <a:rPr lang="en-US" sz="1700" i="1" dirty="0">
+                <a:latin typeface="Bookman Old Style" panose="02050604050505020204" pitchFamily="18" charset="0"/>
+              </a:rPr>
+              <a:t>MPU-6050</a:t>
+            </a:r>
+            <a:r>
               <a:rPr lang="en-US" sz="1700" dirty="0">
                 <a:latin typeface="Bookman Old Style" panose="02050604050505020204" pitchFamily="18" charset="0"/>
               </a:rPr>
-              <a:t>MPU-6050 </a:t>
+              <a:t> </a:t>
             </a:r>
             <a:r>
               <a:rPr lang="ru-RU" sz="1700" dirty="0">
@@ -9445,7 +9229,7 @@
               <a:buAutoNum type="arabicPeriod"/>
             </a:pPr>
             <a:r>
-              <a:rPr lang="en-US" sz="1700" dirty="0">
+              <a:rPr lang="en-US" sz="1700" i="1" dirty="0">
                 <a:latin typeface="Bookman Old Style" panose="02050604050505020204" pitchFamily="18" charset="0"/>
               </a:rPr>
               <a:t>Arduino Pro Micro </a:t>
@@ -9463,22 +9247,28 @@
               <a:buAutoNum type="arabicPeriod"/>
             </a:pPr>
             <a:r>
+              <a:rPr lang="ru-RU" sz="1700" i="1" dirty="0">
+                <a:latin typeface="Bookman Old Style" panose="02050604050505020204" pitchFamily="18" charset="0"/>
+              </a:rPr>
+              <a:t>Инкрементальный энкодер </a:t>
+            </a:r>
+            <a:r>
+              <a:rPr lang="en-US" sz="1700" i="1" dirty="0">
+                <a:latin typeface="Bookman Old Style" panose="02050604050505020204" pitchFamily="18" charset="0"/>
+              </a:rPr>
+              <a:t>EC11</a:t>
+            </a:r>
+            <a:r>
+              <a:rPr lang="ru-RU" sz="1700" i="1" dirty="0">
+                <a:latin typeface="Bookman Old Style" panose="02050604050505020204" pitchFamily="18" charset="0"/>
+              </a:rPr>
+              <a:t> </a:t>
+            </a:r>
+            <a:r>
               <a:rPr lang="ru-RU" sz="1700" dirty="0">
                 <a:latin typeface="Bookman Old Style" panose="02050604050505020204" pitchFamily="18" charset="0"/>
               </a:rPr>
-              <a:t>Инкрементальный энкодер </a:t>
-            </a:r>
-            <a:r>
-              <a:rPr lang="en-US" sz="1700" dirty="0">
-                <a:latin typeface="Bookman Old Style" panose="02050604050505020204" pitchFamily="18" charset="0"/>
-              </a:rPr>
-              <a:t>EC11</a:t>
-            </a:r>
-            <a:r>
-              <a:rPr lang="ru-RU" sz="1700" dirty="0">
-                <a:latin typeface="Bookman Old Style" panose="02050604050505020204" pitchFamily="18" charset="0"/>
-              </a:rPr>
-              <a:t> для имитации прокрутки колесика мыши</a:t>
+              <a:t>для имитации прокрутки колесика мыши</a:t>
             </a:r>
           </a:p>
           <a:p>
@@ -9487,10 +9277,16 @@
               <a:buAutoNum type="arabicPeriod"/>
             </a:pPr>
             <a:r>
+              <a:rPr lang="ru-RU" sz="1700" i="1" dirty="0">
+                <a:latin typeface="Bookman Old Style" panose="02050604050505020204" pitchFamily="18" charset="0"/>
+              </a:rPr>
+              <a:t>Тактовые кнопки </a:t>
+            </a:r>
+            <a:r>
               <a:rPr lang="ru-RU" sz="1700" dirty="0">
                 <a:latin typeface="Bookman Old Style" panose="02050604050505020204" pitchFamily="18" charset="0"/>
               </a:rPr>
-              <a:t>Тактовые кнопки для выбора чувствительности и имитации левого/правого клика мыши</a:t>
+              <a:t>для выбора чувствительности и имитации левого/правого клика мыши</a:t>
             </a:r>
           </a:p>
         </p:txBody>
@@ -9657,13 +9453,6 @@
   <p:clrMapOvr>
     <a:masterClrMapping/>
   </p:clrMapOvr>
-  <p:timing>
-    <p:tnLst>
-      <p:par>
-        <p:cTn id="1" dur="indefinite" restart="never" nodeType="tmRoot"/>
-      </p:par>
-    </p:tnLst>
-  </p:timing>
 </p:sld>
 </file>
 
@@ -9911,13 +9700,6 @@
   <p:clrMapOvr>
     <a:masterClrMapping/>
   </p:clrMapOvr>
-  <p:timing>
-    <p:tnLst>
-      <p:par>
-        <p:cTn id="1" dur="indefinite" restart="never" nodeType="tmRoot"/>
-      </p:par>
-    </p:tnLst>
-  </p:timing>
 </p:sld>
 </file>
 
@@ -10304,7 +10086,7 @@
         <p:spPr>
           <a:xfrm>
             <a:off x="248263" y="4674337"/>
-            <a:ext cx="5876925" cy="836126"/>
+            <a:ext cx="5876925" cy="799963"/>
           </a:xfrm>
           <a:prstGeom prst="rect">
             <a:avLst/>
@@ -10356,11 +10138,14 @@
               <a:rPr lang="en-US" dirty="0">
                 <a:latin typeface="Bookman Old Style" panose="02050604050505020204" pitchFamily="18" charset="0"/>
               </a:rPr>
-              <a:t>5.3</a:t>
-            </a:r>
-            <a:endParaRPr lang="ru-RU" dirty="0">
-              <a:latin typeface="Bookman Old Style" panose="02050604050505020204" pitchFamily="18" charset="0"/>
-            </a:endParaRPr>
+              <a:t>5.</a:t>
+            </a:r>
+            <a:r>
+              <a:rPr lang="ru-RU" dirty="0">
+                <a:latin typeface="Bookman Old Style" panose="02050604050505020204" pitchFamily="18" charset="0"/>
+              </a:rPr>
+              <a:t>4</a:t>
+            </a:r>
           </a:p>
         </p:txBody>
       </p:sp>
@@ -10433,13 +10218,7 @@
               <a:rPr lang="ru-RU" sz="2000" dirty="0">
                 <a:latin typeface="Bookman Old Style" panose="02050604050505020204" pitchFamily="18" charset="0"/>
               </a:rPr>
-              <a:t>Создан работающий </a:t>
-            </a:r>
-            <a:r>
-              <a:rPr lang="ru-RU" sz="2000" dirty="0" smtClean="0">
-                <a:latin typeface="Bookman Old Style" panose="02050604050505020204" pitchFamily="18" charset="0"/>
-              </a:rPr>
-              <a:t>прототип</a:t>
+              <a:t>Создан работающий прототип</a:t>
             </a:r>
           </a:p>
           <a:p>
@@ -10450,7 +10229,7 @@
               <a:buFont typeface="Arial" panose="020B0604020202020204" pitchFamily="34" charset="0"/>
               <a:buChar char="•"/>
             </a:pPr>
-            <a:endParaRPr lang="en-US" sz="2000" dirty="0" smtClean="0">
+            <a:endParaRPr lang="en-US" sz="2000" dirty="0">
               <a:latin typeface="Bookman Old Style" panose="02050604050505020204" pitchFamily="18" charset="0"/>
             </a:endParaRPr>
           </a:p>
@@ -10463,22 +10242,10 @@
               <a:buChar char="•"/>
             </a:pPr>
             <a:r>
-              <a:rPr lang="ru-RU" sz="2000" dirty="0" smtClean="0">
-                <a:latin typeface="Bookman Old Style" panose="02050604050505020204" pitchFamily="18" charset="0"/>
-              </a:rPr>
-              <a:t>Устройство </a:t>
-            </a:r>
-            <a:r>
               <a:rPr lang="ru-RU" sz="2000" dirty="0">
                 <a:latin typeface="Bookman Old Style" panose="02050604050505020204" pitchFamily="18" charset="0"/>
               </a:rPr>
-              <a:t>не имеет колоссальной </a:t>
-            </a:r>
-            <a:r>
-              <a:rPr lang="ru-RU" sz="2000" dirty="0" smtClean="0">
-                <a:latin typeface="Bookman Old Style" panose="02050604050505020204" pitchFamily="18" charset="0"/>
-              </a:rPr>
-              <a:t>цены.</a:t>
+              <a:t>Устройство не имеет колоссальной цены.</a:t>
             </a:r>
           </a:p>
           <a:p>
